--- a/docs/paper/diagram-sources-2026-09-16/figS6_ranking_tests.pptx
+++ b/docs/paper/diagram-sources-2026-09-16/figS6_ranking_tests.pptx
@@ -8,7 +8,7 @@
     <p:sldId id="256" r:id="rId7"/>
     <p:sldId id="257" r:id="rId9"/>
   </p:sldIdLst>
-  <p:sldSz cx="3204000" cy="2556000" type="screen4x3"/>
+  <p:sldSz cx="6408000" cy="7308000" type="screen4x3"/>
   <p:notesSz cx="6858000" cy="9144000"/>
   <p:defaultTextStyle>
     <a:defPPr>
@@ -3588,7 +3588,7 @@
         <p:spPr>
           <a:xfrm>
             <a:off x="0" y="0"/>
-            <a:ext cx="3204000" cy="2556000"/>
+            <a:ext cx="6408000" cy="7308000"/>
           </a:xfrm>
           <a:prstGeom prst="rect">
             <a:avLst/>
@@ -3640,6 +3640,65 @@
         <p:spPr>
           <a:xfrm>
             <a:off x="0" y="0"/>
+            <a:ext cx="6408000" cy="4752000"/>
+          </a:xfrm>
+          <a:prstGeom prst="rect">
+            <a:avLst/>
+          </a:prstGeom>
+        </p:spPr>
+      </p:pic>
+      <p:sp>
+        <p:nvSpPr>
+          <p:cNvPr id="4" name="panel-a"/>
+          <p:cNvSpPr txBox="1"/>
+          <p:nvPr/>
+        </p:nvSpPr>
+        <p:spPr>
+          <a:xfrm>
+            <a:off x="72000" y="18000"/>
+            <a:ext cx="252000" cy="180000"/>
+          </a:xfrm>
+          <a:prstGeom prst="rect">
+            <a:avLst/>
+          </a:prstGeom>
+          <a:noFill/>
+        </p:spPr>
+        <p:txBody>
+          <a:bodyPr wrap="square" lIns="0" rIns="0" tIns="0" bIns="0">
+            <a:spAutoFit/>
+          </a:bodyPr>
+          <a:lstStyle/>
+          <a:p>
+            <a:pPr algn="l"/>
+            <a:r>
+              <a:rPr sz="1000" b="1">
+                <a:solidFill>
+                  <a:srgbClr val="1F2A30"/>
+                </a:solidFill>
+                <a:latin typeface="Arial"/>
+              </a:rPr>
+              <a:t>(a)</a:t>
+            </a:r>
+          </a:p>
+        </p:txBody>
+      </p:sp>
+      <p:pic>
+        <p:nvPicPr>
+          <p:cNvPr id="5" name="panel-b-image" descr="figS6_ranking_tests.b.png"/>
+          <p:cNvPicPr>
+            <a:picLocks noChangeAspect="1"/>
+          </p:cNvPicPr>
+          <p:nvPr/>
+        </p:nvPicPr>
+        <p:blipFill>
+          <a:blip r:embed="rId4"/>
+          <a:stretch>
+            <a:fillRect/>
+          </a:stretch>
+        </p:blipFill>
+        <p:spPr>
+          <a:xfrm>
+            <a:off x="0" y="4752000"/>
             <a:ext cx="3204000" cy="2556000"/>
           </a:xfrm>
           <a:prstGeom prst="rect">
@@ -3647,6 +3706,100 @@
           </a:prstGeom>
         </p:spPr>
       </p:pic>
+      <p:sp>
+        <p:nvSpPr>
+          <p:cNvPr id="6" name="panel-b"/>
+          <p:cNvSpPr txBox="1"/>
+          <p:nvPr/>
+        </p:nvSpPr>
+        <p:spPr>
+          <a:xfrm>
+            <a:off x="72000" y="4770000"/>
+            <a:ext cx="252000" cy="180000"/>
+          </a:xfrm>
+          <a:prstGeom prst="rect">
+            <a:avLst/>
+          </a:prstGeom>
+          <a:noFill/>
+        </p:spPr>
+        <p:txBody>
+          <a:bodyPr wrap="square" lIns="0" rIns="0" tIns="0" bIns="0">
+            <a:spAutoFit/>
+          </a:bodyPr>
+          <a:lstStyle/>
+          <a:p>
+            <a:pPr algn="l"/>
+            <a:r>
+              <a:rPr sz="1000" b="1">
+                <a:solidFill>
+                  <a:srgbClr val="1F2A30"/>
+                </a:solidFill>
+                <a:latin typeface="Arial"/>
+              </a:rPr>
+              <a:t>(b)</a:t>
+            </a:r>
+          </a:p>
+        </p:txBody>
+      </p:sp>
+      <p:pic>
+        <p:nvPicPr>
+          <p:cNvPr id="7" name="panel-c-image" descr="figS6_ranking_tests.c.png"/>
+          <p:cNvPicPr>
+            <a:picLocks noChangeAspect="1"/>
+          </p:cNvPicPr>
+          <p:nvPr/>
+        </p:nvPicPr>
+        <p:blipFill>
+          <a:blip r:embed="rId5"/>
+          <a:stretch>
+            <a:fillRect/>
+          </a:stretch>
+        </p:blipFill>
+        <p:spPr>
+          <a:xfrm>
+            <a:off x="3204000" y="4752000"/>
+            <a:ext cx="3204000" cy="2556000"/>
+          </a:xfrm>
+          <a:prstGeom prst="rect">
+            <a:avLst/>
+          </a:prstGeom>
+        </p:spPr>
+      </p:pic>
+      <p:sp>
+        <p:nvSpPr>
+          <p:cNvPr id="8" name="panel-c"/>
+          <p:cNvSpPr txBox="1"/>
+          <p:nvPr/>
+        </p:nvSpPr>
+        <p:spPr>
+          <a:xfrm>
+            <a:off x="3276000" y="4770000"/>
+            <a:ext cx="252000" cy="180000"/>
+          </a:xfrm>
+          <a:prstGeom prst="rect">
+            <a:avLst/>
+          </a:prstGeom>
+          <a:noFill/>
+        </p:spPr>
+        <p:txBody>
+          <a:bodyPr wrap="square" lIns="0" rIns="0" tIns="0" bIns="0">
+            <a:spAutoFit/>
+          </a:bodyPr>
+          <a:lstStyle/>
+          <a:p>
+            <a:pPr algn="l"/>
+            <a:r>
+              <a:rPr sz="1000" b="1">
+                <a:solidFill>
+                  <a:srgbClr val="1F2A30"/>
+                </a:solidFill>
+                <a:latin typeface="Arial"/>
+              </a:rPr>
+              <a:t>(c)</a:t>
+            </a:r>
+          </a:p>
+        </p:txBody>
+      </p:sp>
     </p:spTree>
   </p:cSld>
   <p:clrMapOvr>
@@ -3674,7 +3827,7 @@
         <p:spPr>
           <a:xfrm>
             <a:off x="0" y="0"/>
-            <a:ext cx="3204000" cy="2556000"/>
+            <a:ext cx="6408000" cy="7308000"/>
           </a:xfrm>
           <a:prstGeom prst="rect">
             <a:avLst/>
@@ -3726,6 +3879,65 @@
         <p:spPr>
           <a:xfrm>
             <a:off x="0" y="0"/>
+            <a:ext cx="6408000" cy="4752000"/>
+          </a:xfrm>
+          <a:prstGeom prst="rect">
+            <a:avLst/>
+          </a:prstGeom>
+        </p:spPr>
+      </p:pic>
+      <p:sp>
+        <p:nvSpPr>
+          <p:cNvPr id="4" name="panel-a"/>
+          <p:cNvSpPr txBox="1"/>
+          <p:nvPr/>
+        </p:nvSpPr>
+        <p:spPr>
+          <a:xfrm>
+            <a:off x="72000" y="18000"/>
+            <a:ext cx="252000" cy="180000"/>
+          </a:xfrm>
+          <a:prstGeom prst="rect">
+            <a:avLst/>
+          </a:prstGeom>
+          <a:noFill/>
+        </p:spPr>
+        <p:txBody>
+          <a:bodyPr wrap="square" lIns="0" rIns="0" tIns="0" bIns="0">
+            <a:spAutoFit/>
+          </a:bodyPr>
+          <a:lstStyle/>
+          <a:p>
+            <a:pPr algn="l"/>
+            <a:r>
+              <a:rPr sz="1000" b="1">
+                <a:solidFill>
+                  <a:srgbClr val="1F2A30"/>
+                </a:solidFill>
+                <a:latin typeface="Arial"/>
+              </a:rPr>
+              <a:t>(a)</a:t>
+            </a:r>
+          </a:p>
+        </p:txBody>
+      </p:sp>
+      <p:pic>
+        <p:nvPicPr>
+          <p:cNvPr id="5" name="panel-b-image" descr="figS6_ranking_tests.b.ko.png"/>
+          <p:cNvPicPr>
+            <a:picLocks noChangeAspect="1"/>
+          </p:cNvPicPr>
+          <p:nvPr/>
+        </p:nvPicPr>
+        <p:blipFill>
+          <a:blip r:embed="rId4"/>
+          <a:stretch>
+            <a:fillRect/>
+          </a:stretch>
+        </p:blipFill>
+        <p:spPr>
+          <a:xfrm>
+            <a:off x="0" y="4752000"/>
             <a:ext cx="3204000" cy="2556000"/>
           </a:xfrm>
           <a:prstGeom prst="rect">
@@ -3733,6 +3945,100 @@
           </a:prstGeom>
         </p:spPr>
       </p:pic>
+      <p:sp>
+        <p:nvSpPr>
+          <p:cNvPr id="6" name="panel-b"/>
+          <p:cNvSpPr txBox="1"/>
+          <p:nvPr/>
+        </p:nvSpPr>
+        <p:spPr>
+          <a:xfrm>
+            <a:off x="72000" y="4770000"/>
+            <a:ext cx="252000" cy="180000"/>
+          </a:xfrm>
+          <a:prstGeom prst="rect">
+            <a:avLst/>
+          </a:prstGeom>
+          <a:noFill/>
+        </p:spPr>
+        <p:txBody>
+          <a:bodyPr wrap="square" lIns="0" rIns="0" tIns="0" bIns="0">
+            <a:spAutoFit/>
+          </a:bodyPr>
+          <a:lstStyle/>
+          <a:p>
+            <a:pPr algn="l"/>
+            <a:r>
+              <a:rPr sz="1000" b="1">
+                <a:solidFill>
+                  <a:srgbClr val="1F2A30"/>
+                </a:solidFill>
+                <a:latin typeface="Arial"/>
+              </a:rPr>
+              <a:t>(b)</a:t>
+            </a:r>
+          </a:p>
+        </p:txBody>
+      </p:sp>
+      <p:pic>
+        <p:nvPicPr>
+          <p:cNvPr id="7" name="panel-c-image" descr="figS6_ranking_tests.c.ko.png"/>
+          <p:cNvPicPr>
+            <a:picLocks noChangeAspect="1"/>
+          </p:cNvPicPr>
+          <p:nvPr/>
+        </p:nvPicPr>
+        <p:blipFill>
+          <a:blip r:embed="rId5"/>
+          <a:stretch>
+            <a:fillRect/>
+          </a:stretch>
+        </p:blipFill>
+        <p:spPr>
+          <a:xfrm>
+            <a:off x="3204000" y="4752000"/>
+            <a:ext cx="3204000" cy="2556000"/>
+          </a:xfrm>
+          <a:prstGeom prst="rect">
+            <a:avLst/>
+          </a:prstGeom>
+        </p:spPr>
+      </p:pic>
+      <p:sp>
+        <p:nvSpPr>
+          <p:cNvPr id="8" name="panel-c"/>
+          <p:cNvSpPr txBox="1"/>
+          <p:nvPr/>
+        </p:nvSpPr>
+        <p:spPr>
+          <a:xfrm>
+            <a:off x="3276000" y="4770000"/>
+            <a:ext cx="252000" cy="180000"/>
+          </a:xfrm>
+          <a:prstGeom prst="rect">
+            <a:avLst/>
+          </a:prstGeom>
+          <a:noFill/>
+        </p:spPr>
+        <p:txBody>
+          <a:bodyPr wrap="square" lIns="0" rIns="0" tIns="0" bIns="0">
+            <a:spAutoFit/>
+          </a:bodyPr>
+          <a:lstStyle/>
+          <a:p>
+            <a:pPr algn="l"/>
+            <a:r>
+              <a:rPr sz="1000" b="1">
+                <a:solidFill>
+                  <a:srgbClr val="1F2A30"/>
+                </a:solidFill>
+                <a:latin typeface="Arial"/>
+              </a:rPr>
+              <a:t>(c)</a:t>
+            </a:r>
+          </a:p>
+        </p:txBody>
+      </p:sp>
     </p:spTree>
   </p:cSld>
   <p:clrMapOvr>
